--- a/catalog/samples/waterfall.pptx
+++ b/catalog/samples/waterfall.pptx
@@ -1392,7 +1392,7 @@
           </a:p>
           <a:p>
             <a:r>
-              <a:t>  "template_sha256": "ed3b6bfc1a958cdeb948243b39adfa52a8cab436da6c499ba220360707969539"</a:t>
+              <a:t>  "template_sha256": "6b0375f6f986f9fe6599765a671e9a558c675274e056dfe05b264e37d313c4b0"</a:t>
             </a:r>
           </a:p>
           <a:p>
@@ -4924,7 +4924,7 @@
                 <a:ea typeface="Yu Gothic" pitchFamily="34" charset="-122"/>
                 <a:cs typeface="Yu Gothic" pitchFamily="34" charset="-120"/>
               </a:rPr>
-              <a:t>18</a:t>
+              <a:t>+18</a:t>
             </a:r>
             <a:endParaRPr lang="en-US" sz="1200" dirty="0"/>
           </a:p>
@@ -5032,7 +5032,7 @@
                 <a:ea typeface="Yu Gothic" pitchFamily="34" charset="-122"/>
                 <a:cs typeface="Yu Gothic" pitchFamily="34" charset="-120"/>
               </a:rPr>
-              <a:t>24</a:t>
+              <a:t>+24</a:t>
             </a:r>
             <a:endParaRPr lang="en-US" sz="1200" dirty="0"/>
           </a:p>
@@ -5248,7 +5248,7 @@
                 <a:ea typeface="Yu Gothic" pitchFamily="34" charset="-122"/>
                 <a:cs typeface="Yu Gothic" pitchFamily="34" charset="-120"/>
               </a:rPr>
-              <a:t>7</a:t>
+              <a:t>+7</a:t>
             </a:r>
             <a:endParaRPr lang="en-US" sz="1200" dirty="0"/>
           </a:p>
